--- a/smart_chicken_coop.pptx
+++ b/smart_chicken_coop.pptx
@@ -5304,7 +5304,7 @@
                 <a:ea typeface="Calibri" pitchFamily="34" charset="-122"/>
                 <a:cs typeface="Calibri" pitchFamily="34" charset="-120"/>
               </a:rPr>
-              <a:t>2× MG996R servo</a:t>
+              <a:t>2× MG995 servo</a:t>
             </a:r>
             <a:endParaRPr lang="en-US" sz="1100" dirty="0"/>
           </a:p>
@@ -7629,7 +7629,7 @@
                 <a:ea typeface="Calibri" pitchFamily="34" charset="-122"/>
                 <a:cs typeface="Calibri" pitchFamily="34" charset="-120"/>
               </a:rPr>
-              <a:t>Two MG996R servos (via PCA9685) push the vent sliders open</a:t>
+              <a:t>Two MG995 servos (via PCA9685) push the vent sliders open</a:t>
             </a:r>
             <a:endParaRPr lang="en-US" sz="1150" dirty="0"/>
           </a:p>
@@ -8243,7 +8243,7 @@
                 <a:ea typeface="Calibri" pitchFamily="34" charset="-122"/>
                 <a:cs typeface="Calibri" pitchFamily="34" charset="-120"/>
               </a:rPr>
-              <a:t>2× MG996R servo</a:t>
+              <a:t>2× MG995 servo</a:t>
             </a:r>
             <a:endParaRPr lang="en-US" sz="1250" dirty="0"/>
           </a:p>
